--- a/index/designs/y8-l14/l5-storage-v-not-v/l5-storage-v-not-v.pptx
+++ b/index/designs/y8-l14/l5-storage-v-not-v/l5-storage-v-not-v.pptx
@@ -5848,8 +5848,8 @@
         </p:nvSpPr>
         <p:spPr>
           <a:xfrm>
-            <a:off x="507950" y="176213"/>
-            <a:ext cx="1371404" cy="180975"/>
+            <a:off x="507950" y="180975"/>
+            <a:ext cx="1264837" cy="171450"/>
           </a:xfrm>
           <a:prstGeom prst="rect">
             <a:avLst/>
@@ -5887,8 +5887,8 @@
         </p:nvSpPr>
         <p:spPr>
           <a:xfrm>
-            <a:off x="2137916" y="166688"/>
-            <a:ext cx="1055043" cy="200025"/>
+            <a:off x="2033439" y="166688"/>
+            <a:ext cx="953333" cy="200025"/>
           </a:xfrm>
           <a:prstGeom prst="rect">
             <a:avLst/>
@@ -5926,8 +5926,8 @@
         </p:nvSpPr>
         <p:spPr>
           <a:xfrm>
-            <a:off x="11209288" y="176213"/>
-            <a:ext cx="484257" cy="180975"/>
+            <a:off x="11244709" y="180975"/>
+            <a:ext cx="448127" cy="171450"/>
           </a:xfrm>
           <a:prstGeom prst="rect">
             <a:avLst/>
@@ -5995,7 +5995,7 @@
         </p:nvSpPr>
         <p:spPr>
           <a:xfrm>
-            <a:off x="609600" y="852636"/>
+            <a:off x="609600" y="833586"/>
             <a:ext cx="11192256" cy="200025"/>
           </a:xfrm>
           <a:prstGeom prst="rect">
@@ -6034,12 +6034,12 @@
         </p:nvSpPr>
         <p:spPr>
           <a:xfrm>
-            <a:off x="609600" y="1052661"/>
-            <a:ext cx="10972800" cy="1041350"/>
+            <a:off x="609600" y="1033611"/>
+            <a:ext cx="10972800" cy="1050875"/>
           </a:xfrm>
           <a:prstGeom prst="roundRect">
             <a:avLst>
-              <a:gd name="adj" fmla="val 6098"/>
+              <a:gd name="adj" fmla="val 6043"/>
             </a:avLst>
           </a:prstGeom>
           <a:solidFill>
@@ -6070,7 +6070,7 @@
         </p:nvSpPr>
         <p:spPr>
           <a:xfrm>
-            <a:off x="822275" y="1214586"/>
+            <a:off x="822275" y="1195536"/>
             <a:ext cx="297841" cy="350490"/>
           </a:xfrm>
           <a:prstGeom prst="rect">
@@ -6112,8 +6112,8 @@
         </p:nvSpPr>
         <p:spPr>
           <a:xfrm>
-            <a:off x="1279327" y="1214586"/>
-            <a:ext cx="3571812" cy="400050"/>
+            <a:off x="1279327" y="1195536"/>
+            <a:ext cx="3595949" cy="400050"/>
           </a:xfrm>
           <a:prstGeom prst="rect">
             <a:avLst/>
@@ -6154,8 +6154,8 @@
         </p:nvSpPr>
         <p:spPr>
           <a:xfrm>
-            <a:off x="1279327" y="1665387"/>
-            <a:ext cx="3571812" cy="266700"/>
+            <a:off x="1279327" y="1646337"/>
+            <a:ext cx="3595949" cy="276225"/>
           </a:xfrm>
           <a:prstGeom prst="rect">
             <a:avLst/>
@@ -6196,12 +6196,12 @@
         </p:nvSpPr>
         <p:spPr>
           <a:xfrm>
-            <a:off x="609600" y="2246412"/>
-            <a:ext cx="10972800" cy="1041350"/>
+            <a:off x="609600" y="2236887"/>
+            <a:ext cx="10972800" cy="1050875"/>
           </a:xfrm>
           <a:prstGeom prst="roundRect">
             <a:avLst>
-              <a:gd name="adj" fmla="val 6098"/>
+              <a:gd name="adj" fmla="val 6043"/>
             </a:avLst>
           </a:prstGeom>
           <a:solidFill>
@@ -6232,7 +6232,7 @@
         </p:nvSpPr>
         <p:spPr>
           <a:xfrm>
-            <a:off x="822275" y="2408337"/>
+            <a:off x="822275" y="2398812"/>
             <a:ext cx="297841" cy="350490"/>
           </a:xfrm>
           <a:prstGeom prst="rect">
@@ -6274,8 +6274,8 @@
         </p:nvSpPr>
         <p:spPr>
           <a:xfrm>
-            <a:off x="1279327" y="2408337"/>
-            <a:ext cx="4769096" cy="400050"/>
+            <a:off x="1279327" y="2398812"/>
+            <a:ext cx="5368269" cy="400050"/>
           </a:xfrm>
           <a:prstGeom prst="rect">
             <a:avLst/>
@@ -6327,8 +6327,8 @@
         </p:nvSpPr>
         <p:spPr>
           <a:xfrm>
-            <a:off x="1279327" y="2859137"/>
-            <a:ext cx="4769096" cy="266700"/>
+            <a:off x="1279327" y="2849612"/>
+            <a:ext cx="5368269" cy="276225"/>
           </a:xfrm>
           <a:prstGeom prst="rect">
             <a:avLst/>
@@ -6370,11 +6370,11 @@
         <p:spPr>
           <a:xfrm>
             <a:off x="609600" y="3440162"/>
-            <a:ext cx="10972800" cy="1041350"/>
+            <a:ext cx="10972800" cy="1050875"/>
           </a:xfrm>
           <a:prstGeom prst="roundRect">
             <a:avLst>
-              <a:gd name="adj" fmla="val 6098"/>
+              <a:gd name="adj" fmla="val 6043"/>
             </a:avLst>
           </a:prstGeom>
           <a:solidFill>
@@ -6490,7 +6490,7 @@
         <p:spPr>
           <a:xfrm>
             <a:off x="1279327" y="4052888"/>
-            <a:ext cx="4080510" cy="266700"/>
+            <a:ext cx="4080510" cy="276225"/>
           </a:xfrm>
           <a:prstGeom prst="rect">
             <a:avLst/>
@@ -6531,12 +6531,12 @@
         </p:nvSpPr>
         <p:spPr>
           <a:xfrm>
-            <a:off x="609600" y="4633913"/>
-            <a:ext cx="10972800" cy="1041350"/>
+            <a:off x="609600" y="4643438"/>
+            <a:ext cx="10972800" cy="1050875"/>
           </a:xfrm>
           <a:prstGeom prst="roundRect">
             <a:avLst>
-              <a:gd name="adj" fmla="val 6098"/>
+              <a:gd name="adj" fmla="val 6043"/>
             </a:avLst>
           </a:prstGeom>
           <a:solidFill>
@@ -6567,7 +6567,7 @@
         </p:nvSpPr>
         <p:spPr>
           <a:xfrm>
-            <a:off x="822275" y="4795838"/>
+            <a:off x="822275" y="4805363"/>
             <a:ext cx="297841" cy="350490"/>
           </a:xfrm>
           <a:prstGeom prst="rect">
@@ -6609,7 +6609,7 @@
         </p:nvSpPr>
         <p:spPr>
           <a:xfrm>
-            <a:off x="1279327" y="4795838"/>
+            <a:off x="1279327" y="4805363"/>
             <a:ext cx="3108960" cy="400050"/>
           </a:xfrm>
           <a:prstGeom prst="rect">
@@ -6651,8 +6651,8 @@
         </p:nvSpPr>
         <p:spPr>
           <a:xfrm>
-            <a:off x="1279327" y="5246638"/>
-            <a:ext cx="3108960" cy="266700"/>
+            <a:off x="1279327" y="5256163"/>
+            <a:ext cx="3108960" cy="276225"/>
           </a:xfrm>
           <a:prstGeom prst="rect">
             <a:avLst/>
@@ -6693,7 +6693,7 @@
         </p:nvSpPr>
         <p:spPr>
           <a:xfrm>
-            <a:off x="609600" y="5802213"/>
+            <a:off x="609600" y="5821263"/>
             <a:ext cx="11192256" cy="228600"/>
           </a:xfrm>
           <a:prstGeom prst="rect">
@@ -7039,7 +7039,7 @@
       </p:sp>
       <p:pic>
         <p:nvPicPr>
-          <p:cNvPr id="10" name="Image 0" descr="/var/folders/6c/210dcgxn4gz5sm71vld2cy1h0000gn/T/tmp.emPkXuZ1Lq/img/shafa.png">    </p:cNvPr>
+          <p:cNvPr id="10" name="Image 0" descr="/var/folders/6c/210dcgxn4gz5sm71vld2cy1h0000gn/T/tmp.owmCEDjpXl/img/shafa.png">    </p:cNvPr>
           <p:cNvPicPr>
             <a:picLocks noChangeAspect="1"/>
           </p:cNvPicPr>
@@ -7138,7 +7138,7 @@
       </p:sp>
       <p:pic>
         <p:nvPicPr>
-          <p:cNvPr id="13" name="Image 1" descr="/var/folders/6c/210dcgxn4gz5sm71vld2cy1h0000gn/T/tmp.emPkXuZ1Lq/img/chaji.png">    </p:cNvPr>
+          <p:cNvPr id="13" name="Image 1" descr="/var/folders/6c/210dcgxn4gz5sm71vld2cy1h0000gn/T/tmp.owmCEDjpXl/img/chaji.png">    </p:cNvPr>
           <p:cNvPicPr>
             <a:picLocks noChangeAspect="1"/>
           </p:cNvPicPr>
@@ -7237,7 +7237,7 @@
       </p:sp>
       <p:pic>
         <p:nvPicPr>
-          <p:cNvPr id="16" name="Image 2" descr="/var/folders/6c/210dcgxn4gz5sm71vld2cy1h0000gn/T/tmp.emPkXuZ1Lq/img/dianshigui.png">    </p:cNvPr>
+          <p:cNvPr id="16" name="Image 2" descr="/var/folders/6c/210dcgxn4gz5sm71vld2cy1h0000gn/T/tmp.owmCEDjpXl/img/dianshigui.png">    </p:cNvPr>
           <p:cNvPicPr>
             <a:picLocks noChangeAspect="1"/>
           </p:cNvPicPr>
@@ -7411,7 +7411,7 @@
       </p:sp>
       <p:pic>
         <p:nvPicPr>
-          <p:cNvPr id="21" name="Image 3" descr="/var/folders/6c/210dcgxn4gz5sm71vld2cy1h0000gn/T/tmp.emPkXuZ1Lq/img/kongtiao.png">    </p:cNvPr>
+          <p:cNvPr id="21" name="Image 3" descr="/var/folders/6c/210dcgxn4gz5sm71vld2cy1h0000gn/T/tmp.owmCEDjpXl/img/kongtiao.png">    </p:cNvPr>
           <p:cNvPicPr>
             <a:picLocks noChangeAspect="1"/>
           </p:cNvPicPr>
@@ -7510,7 +7510,7 @@
       </p:sp>
       <p:pic>
         <p:nvPicPr>
-          <p:cNvPr id="24" name="Image 4" descr="/var/folders/6c/210dcgxn4gz5sm71vld2cy1h0000gn/T/tmp.emPkXuZ1Lq/img/xiyiji.png">    </p:cNvPr>
+          <p:cNvPr id="24" name="Image 4" descr="/var/folders/6c/210dcgxn4gz5sm71vld2cy1h0000gn/T/tmp.owmCEDjpXl/img/xiyiji.png">    </p:cNvPr>
           <p:cNvPicPr>
             <a:picLocks noChangeAspect="1"/>
           </p:cNvPicPr>
@@ -7609,7 +7609,7 @@
       </p:sp>
       <p:pic>
         <p:nvPicPr>
-          <p:cNvPr id="27" name="Image 5" descr="/var/folders/6c/210dcgxn4gz5sm71vld2cy1h0000gn/T/tmp.emPkXuZ1Lq/img/limian.png">    </p:cNvPr>
+          <p:cNvPr id="27" name="Image 5" descr="/var/folders/6c/210dcgxn4gz5sm71vld2cy1h0000gn/T/tmp.owmCEDjpXl/img/limian.png">    </p:cNvPr>
           <p:cNvPicPr>
             <a:picLocks noChangeAspect="1"/>
           </p:cNvPicPr>
@@ -7708,7 +7708,7 @@
       </p:sp>
       <p:pic>
         <p:nvPicPr>
-          <p:cNvPr id="30" name="Image 6" descr="/var/folders/6c/210dcgxn4gz5sm71vld2cy1h0000gn/T/tmp.emPkXuZ1Lq/img/bingxiang.png">    </p:cNvPr>
+          <p:cNvPr id="30" name="Image 6" descr="/var/folders/6c/210dcgxn4gz5sm71vld2cy1h0000gn/T/tmp.owmCEDjpXl/img/bingxiang.png">    </p:cNvPr>
           <p:cNvPicPr>
             <a:picLocks noChangeAspect="1"/>
           </p:cNvPicPr>
@@ -7807,7 +7807,7 @@
       </p:sp>
       <p:pic>
         <p:nvPicPr>
-          <p:cNvPr id="33" name="Image 7" descr="/var/folders/6c/210dcgxn4gz5sm71vld2cy1h0000gn/T/tmp.emPkXuZ1Lq/img/kaoxiang.png">    </p:cNvPr>
+          <p:cNvPr id="33" name="Image 7" descr="/var/folders/6c/210dcgxn4gz5sm71vld2cy1h0000gn/T/tmp.owmCEDjpXl/img/kaoxiang.png">    </p:cNvPr>
           <p:cNvPicPr>
             <a:picLocks noChangeAspect="1"/>
           </p:cNvPicPr>
@@ -7906,7 +7906,7 @@
       </p:sp>
       <p:pic>
         <p:nvPicPr>
-          <p:cNvPr id="36" name="Image 8" descr="/var/folders/6c/210dcgxn4gz5sm71vld2cy1h0000gn/T/tmp.emPkXuZ1Lq/img/dianlu.png">    </p:cNvPr>
+          <p:cNvPr id="36" name="Image 8" descr="/var/folders/6c/210dcgxn4gz5sm71vld2cy1h0000gn/T/tmp.owmCEDjpXl/img/dianlu.png">    </p:cNvPr>
           <p:cNvPicPr>
             <a:picLocks noChangeAspect="1"/>
           </p:cNvPicPr>
@@ -8005,7 +8005,7 @@
       </p:sp>
       <p:pic>
         <p:nvPicPr>
-          <p:cNvPr id="39" name="Image 9" descr="/var/folders/6c/210dcgxn4gz5sm71vld2cy1h0000gn/T/tmp.emPkXuZ1Lq/img/yizi.png">    </p:cNvPr>
+          <p:cNvPr id="39" name="Image 9" descr="/var/folders/6c/210dcgxn4gz5sm71vld2cy1h0000gn/T/tmp.owmCEDjpXl/img/yizi.png">    </p:cNvPr>
           <p:cNvPicPr>
             <a:picLocks noChangeAspect="1"/>
           </p:cNvPicPr>
@@ -8179,7 +8179,7 @@
       </p:sp>
       <p:pic>
         <p:nvPicPr>
-          <p:cNvPr id="44" name="Image 10" descr="/var/folders/6c/210dcgxn4gz5sm71vld2cy1h0000gn/T/tmp.emPkXuZ1Lq/img/shuzhuo.png">    </p:cNvPr>
+          <p:cNvPr id="44" name="Image 10" descr="/var/folders/6c/210dcgxn4gz5sm71vld2cy1h0000gn/T/tmp.owmCEDjpXl/img/shuzhuo.png">    </p:cNvPr>
           <p:cNvPicPr>
             <a:picLocks noChangeAspect="1"/>
           </p:cNvPicPr>
@@ -8278,7 +8278,7 @@
       </p:sp>
       <p:pic>
         <p:nvPicPr>
-          <p:cNvPr id="47" name="Image 11" descr="/var/folders/6c/210dcgxn4gz5sm71vld2cy1h0000gn/T/tmp.emPkXuZ1Lq/img/yigui.png">    </p:cNvPr>
+          <p:cNvPr id="47" name="Image 11" descr="/var/folders/6c/210dcgxn4gz5sm71vld2cy1h0000gn/T/tmp.owmCEDjpXl/img/yigui.png">    </p:cNvPr>
           <p:cNvPicPr>
             <a:picLocks noChangeAspect="1"/>
           </p:cNvPicPr>
@@ -8377,7 +8377,7 @@
       </p:sp>
       <p:pic>
         <p:nvPicPr>
-          <p:cNvPr id="50" name="Image 12" descr="/var/folders/6c/210dcgxn4gz5sm71vld2cy1h0000gn/T/tmp.emPkXuZ1Lq/img/shujia.png">    </p:cNvPr>
+          <p:cNvPr id="50" name="Image 12" descr="/var/folders/6c/210dcgxn4gz5sm71vld2cy1h0000gn/T/tmp.owmCEDjpXl/img/shujia.png">    </p:cNvPr>
           <p:cNvPicPr>
             <a:picLocks noChangeAspect="1"/>
           </p:cNvPicPr>
@@ -9140,8 +9140,8 @@
         </p:nvSpPr>
         <p:spPr>
           <a:xfrm>
-            <a:off x="507950" y="176213"/>
-            <a:ext cx="2644893" cy="180975"/>
+            <a:off x="507950" y="180975"/>
+            <a:ext cx="2386370" cy="171450"/>
           </a:xfrm>
           <a:prstGeom prst="rect">
             <a:avLst/>
@@ -9179,8 +9179,8 @@
         </p:nvSpPr>
         <p:spPr>
           <a:xfrm>
-            <a:off x="3386435" y="166688"/>
-            <a:ext cx="1296260" cy="200025"/>
+            <a:off x="3132981" y="166688"/>
+            <a:ext cx="1206392" cy="200025"/>
           </a:xfrm>
           <a:prstGeom prst="rect">
             <a:avLst/>
@@ -9218,8 +9218,8 @@
         </p:nvSpPr>
         <p:spPr>
           <a:xfrm>
-            <a:off x="11208246" y="176213"/>
-            <a:ext cx="485320" cy="180975"/>
+            <a:off x="11244709" y="180975"/>
+            <a:ext cx="448127" cy="171450"/>
           </a:xfrm>
           <a:prstGeom prst="rect">
             <a:avLst/>
@@ -9682,8 +9682,8 @@
         </p:nvSpPr>
         <p:spPr>
           <a:xfrm>
-            <a:off x="507950" y="176213"/>
-            <a:ext cx="2644893" cy="180975"/>
+            <a:off x="507950" y="180975"/>
+            <a:ext cx="2386370" cy="171450"/>
           </a:xfrm>
           <a:prstGeom prst="rect">
             <a:avLst/>
@@ -9721,8 +9721,8 @@
         </p:nvSpPr>
         <p:spPr>
           <a:xfrm>
-            <a:off x="3386435" y="166688"/>
-            <a:ext cx="1504840" cy="200025"/>
+            <a:off x="3132981" y="166688"/>
+            <a:ext cx="1341194" cy="200025"/>
           </a:xfrm>
           <a:prstGeom prst="rect">
             <a:avLst/>
@@ -9760,8 +9760,8 @@
         </p:nvSpPr>
         <p:spPr>
           <a:xfrm>
-            <a:off x="11214646" y="176213"/>
-            <a:ext cx="478792" cy="180975"/>
+            <a:off x="11244709" y="180975"/>
+            <a:ext cx="448127" cy="171450"/>
           </a:xfrm>
           <a:prstGeom prst="rect">
             <a:avLst/>
@@ -10442,7 +10442,7 @@
         <p:spPr>
           <a:xfrm>
             <a:off x="6765727" y="2069753"/>
-            <a:ext cx="1266051" cy="342900"/>
+            <a:ext cx="1213982" cy="342900"/>
           </a:xfrm>
           <a:prstGeom prst="rect">
             <a:avLst/>
@@ -10484,7 +10484,7 @@
         <p:spPr>
           <a:xfrm>
             <a:off x="6765727" y="2450753"/>
-            <a:ext cx="1266051" cy="248989"/>
+            <a:ext cx="1213982" cy="248989"/>
           </a:xfrm>
           <a:prstGeom prst="rect">
             <a:avLst/>
@@ -18392,7 +18392,7 @@
       </p:sp>
       <p:pic>
         <p:nvPicPr>
-          <p:cNvPr id="10" name="Image 0" descr="/var/folders/6c/210dcgxn4gz5sm71vld2cy1h0000gn/T/tmp.emPkXuZ1Lq/img/yigui.png">    </p:cNvPr>
+          <p:cNvPr id="10" name="Image 0" descr="/var/folders/6c/210dcgxn4gz5sm71vld2cy1h0000gn/T/tmp.owmCEDjpXl/img/yigui.png">    </p:cNvPr>
           <p:cNvPicPr>
             <a:picLocks noChangeAspect="1"/>
           </p:cNvPicPr>
@@ -18572,7 +18572,7 @@
       </p:sp>
       <p:pic>
         <p:nvPicPr>
-          <p:cNvPr id="15" name="Image 1" descr="/var/folders/6c/210dcgxn4gz5sm71vld2cy1h0000gn/T/tmp.emPkXuZ1Lq/img/shujia.png">    </p:cNvPr>
+          <p:cNvPr id="15" name="Image 1" descr="/var/folders/6c/210dcgxn4gz5sm71vld2cy1h0000gn/T/tmp.owmCEDjpXl/img/shujia.png">    </p:cNvPr>
           <p:cNvPicPr>
             <a:picLocks noChangeAspect="1"/>
           </p:cNvPicPr>
